--- a/assets/memos/A4-memo.pptx
+++ b/assets/memos/A4-memo.pptx
@@ -3105,8 +3105,8 @@
         </p:nvSpPr>
         <p:spPr>
           <a:xfrm>
-            <a:off x="648000" y="1180800"/>
-            <a:ext cx="5058000" cy="511200"/>
+            <a:off x="532800" y="1180800"/>
+            <a:ext cx="6490800" cy="511200"/>
           </a:xfrm>
           <a:prstGeom prst="rect">
             <a:avLst/>
@@ -3128,7 +3128,7 @@
               </a:spcAft>
             </a:pPr>
             <a:r>
-              <a:rPr sz="2000" b="1" i="0">
+              <a:rPr sz="1800" b="1" i="0">
                 <a:solidFill>
                   <a:srgbClr val="4388BC"/>
                 </a:solidFill>
@@ -4562,8 +4562,8 @@
         </p:nvSpPr>
         <p:spPr>
           <a:xfrm>
-            <a:off x="648000" y="1180800"/>
-            <a:ext cx="5058000" cy="511200"/>
+            <a:off x="532800" y="1180800"/>
+            <a:ext cx="6490800" cy="511200"/>
           </a:xfrm>
           <a:prstGeom prst="rect">
             <a:avLst/>
@@ -4585,7 +4585,7 @@
               </a:spcAft>
             </a:pPr>
             <a:r>
-              <a:rPr sz="2000" b="1" i="0">
+              <a:rPr sz="1800" b="1" i="0">
                 <a:solidFill>
                   <a:srgbClr val="4388BC"/>
                 </a:solidFill>

--- a/assets/memos/A4-memo.pptx
+++ b/assets/memos/A4-memo.pptx
@@ -3402,7 +3402,7 @@
                 </a:solidFill>
                 <a:latin typeface="Arial"/>
               </a:rPr>
-              <a:t>→ Une application (ou « app ») est un petit programme que vous inst…</a:t>
+              <a:t>→ Une application (ou « app ») est un petit programme que vous installez sur votre smartphone pour accomplir une tâche précise. Comme les outils dans une boîte à outils : chaque app a sa fonction.</a:t>
             </a:r>
           </a:p>
           <a:p>
@@ -3708,7 +3708,7 @@
                 </a:solidFill>
                 <a:latin typeface="Arial"/>
               </a:rPr>
-              <a:t>→ Selon votre téléphone, vous accédez à une boutique officielle dif…</a:t>
+              <a:t>→ Selon votre téléphone, vous accédez à une boutique officielle différente. C'est là que vous trouverez toutes les applications vérifiées et sécurisées.</a:t>
             </a:r>
           </a:p>
           <a:p>
@@ -3746,7 +3746,7 @@
                 </a:solidFill>
                 <a:latin typeface="Arial"/>
               </a:rPr>
-              <a:t>→ La boutique d'Apple, accessible via l'icône bleue avec un « A ». …</a:t>
+              <a:t>→ La boutique d'Apple, accessible via l'icône bleue avec un « A ». Toutes les apps sont vérifiées par Apple avant d'être publiées, ce qui garantit un niveau de sécurité élevé.</a:t>
             </a:r>
           </a:p>
           <a:p>
@@ -4014,7 +4014,7 @@
                 </a:solidFill>
                 <a:latin typeface="Arial"/>
               </a:rPr>
-              <a:t>→ Avant de télécharger, prenez le temps de chercher et de comparer.…</a:t>
+              <a:t>→ Avant de télécharger, prenez le temps de chercher et de comparer. Une bonne application est celle qui correspond vraiment à votre besoin — pas forcément la première qui apparaît.</a:t>
             </a:r>
           </a:p>
           <a:p>
@@ -4052,7 +4052,7 @@
                 </a:solidFill>
                 <a:latin typeface="Arial"/>
               </a:rPr>
-              <a:t>→ Utilisez la barre de recherche en haut de la boutique. Essayez de…</a:t>
+              <a:t>→ Utilisez la barre de recherche en haut de la boutique. Essayez des termes comme « météo », « recettes », « transport en commun » ou le nom exact de l'app.</a:t>
             </a:r>
           </a:p>
           <a:p>
@@ -4278,7 +4278,7 @@
                 </a:solidFill>
                 <a:latin typeface="Arial"/>
               </a:rPr>
-              <a:t>Organiser ses applications sur l'écran d'accu…</a:t>
+              <a:t>Organiser ses applications sur l'écran d'accueil</a:t>
             </a:r>
           </a:p>
         </p:txBody>
@@ -4320,7 +4320,7 @@
                 </a:solidFill>
                 <a:latin typeface="Arial"/>
               </a:rPr>
-              <a:t>→ Au fil du temps, les applications s'accumulent et l'écran d'accue…</a:t>
+              <a:t>→ Au fil du temps, les applications s'accumulent et l'écran d'accueil devient difficile à lire. Voici comment garder un téléphone bien rangé et agréable à utiliser.</a:t>
             </a:r>
           </a:p>
           <a:p>
@@ -4358,7 +4358,7 @@
                 </a:solidFill>
                 <a:latin typeface="Arial"/>
               </a:rPr>
-              <a:t>→ Maintenez votre doigt appuyé sur une icône jusqu'à ce qu'elle « t…</a:t>
+              <a:t>→ Maintenez votre doigt appuyé sur une icône jusqu'à ce qu'elle « tremble », puis faites-la glisser sur une autre app. Un dossier se crée automatiquement ! Nommez-le selon la catégorie : « Photos », « Finances », « Santé »</a:t>
             </a:r>
           </a:p>
           <a:p>
@@ -4462,7 +4462,7 @@
                 </a:solidFill>
                 <a:latin typeface="Arial"/>
               </a:rPr>
-              <a:t>→ Suite en page 2 : Mettre à jour ses applications : pourquoi c'e… | Désinstaller une application : comment et qua… | Gérer l'espace de stockage de son téléphone</a:t>
+              <a:t>→ Suite en page 2 : Mettre à jour ses applications : pourquoi c'est important ? | Désinstaller une application : comment et quand ? | Gérer l'espace de stockage de son téléphone</a:t>
             </a:r>
           </a:p>
           <a:p>
@@ -4817,7 +4817,7 @@
                 </a:solidFill>
                 <a:latin typeface="Arial"/>
               </a:rPr>
-              <a:t>Mettre à jour ses applications : pourquoi c'e…</a:t>
+              <a:t>Mettre à jour ses applications : pourquoi c'est important ?</a:t>
             </a:r>
           </a:p>
         </p:txBody>
@@ -4859,7 +4859,7 @@
                 </a:solidFill>
                 <a:latin typeface="Arial"/>
               </a:rPr>
-              <a:t>→ Une mise à jour, c'est comme une révision de voiture : elle corri…</a:t>
+              <a:t>→ Une mise à jour, c'est comme une révision de voiture : elle corrige les problèmes, améliore les performances et renforce la sécurité. Ne les ignorez pas !</a:t>
             </a:r>
           </a:p>
           <a:p>
@@ -4897,7 +4897,7 @@
                 </a:solidFill>
                 <a:latin typeface="Arial"/>
               </a:rPr>
-              <a:t>→ Les mises à jour corrigent les failles de sécurité qui pourraient…</a:t>
+              <a:t>→ Les mises à jour corrigent les failles de sécurité qui pourraient être exploitées par des personnes malveillantes pour accéder à vos données.</a:t>
             </a:r>
           </a:p>
           <a:p>
@@ -5123,7 +5123,7 @@
                 </a:solidFill>
                 <a:latin typeface="Arial"/>
               </a:rPr>
-              <a:t>Désinstaller une application : comment et qua…</a:t>
+              <a:t>Désinstaller une application : comment et quand ?</a:t>
             </a:r>
           </a:p>
         </p:txBody>
@@ -5165,7 +5165,7 @@
                 </a:solidFill>
                 <a:latin typeface="Arial"/>
               </a:rPr>
-              <a:t>→ Supprimer des applications inutilisées est une excellente habitud…</a:t>
+              <a:t>→ Supprimer des applications inutilisées est une excellente habitude : cela libère de l'espace, améliore les performances de votre téléphone et renforce votre vie privée.</a:t>
             </a:r>
           </a:p>
           <a:p>
@@ -5203,7 +5203,7 @@
                 </a:solidFill>
                 <a:latin typeface="Arial"/>
               </a:rPr>
-              <a:t>→ Appuyez longuement sur l'icône  touchez « Supprimer l'app »  conf…</a:t>
+              <a:t>→ Appuyez longuement sur l'icône  touchez « Supprimer l'app »  confirmez. Autre méthode : Réglages  Général  Stockage iPhone  choisissez l'app  Supprimer.</a:t>
             </a:r>
           </a:p>
           <a:p>
@@ -5471,7 +5471,7 @@
                 </a:solidFill>
                 <a:latin typeface="Arial"/>
               </a:rPr>
-              <a:t>→ Les applications, photos et vidéos prennent de la place. Quand le…</a:t>
+              <a:t>→ Les applications, photos et vidéos prennent de la place. Quand le téléphone est plein, il ralentit et ne peut plus recevoir de mises à jour. Voici comment surveiller et optimiser l'espace disponible.</a:t>
             </a:r>
           </a:p>
           <a:p>
@@ -5490,7 +5490,7 @@
                 </a:solidFill>
                 <a:latin typeface="Arial"/>
               </a:rPr>
-              <a:t>→ Quand votre téléphone affiche « Espace insuffisant », commencez t…</a:t>
+              <a:t>→ Quand votre téléphone affiche « Espace insuffisant », commencez toujours par supprimer les applications inutilisées et vider la corbeille des photos — c'est souvent suffisant.</a:t>
             </a:r>
           </a:p>
         </p:txBody>

--- a/assets/memos/A4-memo.pptx
+++ b/assets/memos/A4-memo.pptx
@@ -3167,7 +3167,7 @@
         <p:spPr>
           <a:xfrm>
             <a:off x="532800" y="1749600"/>
-            <a:ext cx="6490800" cy="1371600"/>
+            <a:ext cx="6490800" cy="1533600"/>
           </a:xfrm>
           <a:prstGeom prst="rect">
             <a:avLst/>
@@ -3208,7 +3208,7 @@
         <p:spPr>
           <a:xfrm>
             <a:off x="532800" y="1749600"/>
-            <a:ext cx="572400" cy="1371600"/>
+            <a:ext cx="572400" cy="1533600"/>
           </a:xfrm>
           <a:prstGeom prst="rect">
             <a:avLst/>
@@ -3374,7 +3374,7 @@
         <p:spPr>
           <a:xfrm>
             <a:off x="1159200" y="2214000"/>
-            <a:ext cx="5828400" cy="885600"/>
+            <a:ext cx="5828400" cy="1033199"/>
           </a:xfrm>
           <a:prstGeom prst="rect">
             <a:avLst/>
@@ -3472,8 +3472,8 @@
         </p:nvSpPr>
         <p:spPr>
           <a:xfrm>
-            <a:off x="532800" y="3186000"/>
-            <a:ext cx="6490800" cy="1371600"/>
+            <a:off x="532800" y="3348000"/>
+            <a:ext cx="6490800" cy="1684800"/>
           </a:xfrm>
           <a:prstGeom prst="rect">
             <a:avLst/>
@@ -3513,8 +3513,8 @@
         </p:nvSpPr>
         <p:spPr>
           <a:xfrm>
-            <a:off x="532800" y="3186000"/>
-            <a:ext cx="572400" cy="1371600"/>
+            <a:off x="532800" y="3348000"/>
+            <a:ext cx="572400" cy="1684800"/>
           </a:xfrm>
           <a:prstGeom prst="rect">
             <a:avLst/>
@@ -3554,7 +3554,7 @@
         </p:nvSpPr>
         <p:spPr>
           <a:xfrm>
-            <a:off x="1206000" y="3607200"/>
+            <a:off x="1206000" y="3769200"/>
             <a:ext cx="5752800" cy="7200"/>
           </a:xfrm>
           <a:prstGeom prst="rect">
@@ -3595,7 +3595,7 @@
         </p:nvSpPr>
         <p:spPr>
           <a:xfrm>
-            <a:off x="532800" y="3252600"/>
+            <a:off x="532800" y="3414600"/>
             <a:ext cx="572400" cy="288000"/>
           </a:xfrm>
           <a:prstGeom prst="rect">
@@ -3637,7 +3637,7 @@
         </p:nvSpPr>
         <p:spPr>
           <a:xfrm>
-            <a:off x="1177200" y="3221999"/>
+            <a:off x="1177200" y="3384000"/>
             <a:ext cx="5810400" cy="370799"/>
           </a:xfrm>
           <a:prstGeom prst="rect">
@@ -3679,8 +3679,8 @@
         </p:nvSpPr>
         <p:spPr>
           <a:xfrm>
-            <a:off x="1159200" y="3650399"/>
-            <a:ext cx="5828400" cy="885600"/>
+            <a:off x="1159200" y="3812400"/>
+            <a:ext cx="5828400" cy="1184399"/>
           </a:xfrm>
           <a:prstGeom prst="rect">
             <a:avLst/>
@@ -3778,8 +3778,8 @@
         </p:nvSpPr>
         <p:spPr>
           <a:xfrm>
-            <a:off x="532800" y="4622400"/>
-            <a:ext cx="6490800" cy="1371600"/>
+            <a:off x="532800" y="5097600"/>
+            <a:ext cx="6490800" cy="1684800"/>
           </a:xfrm>
           <a:prstGeom prst="rect">
             <a:avLst/>
@@ -3819,8 +3819,8 @@
         </p:nvSpPr>
         <p:spPr>
           <a:xfrm>
-            <a:off x="532800" y="4622400"/>
-            <a:ext cx="572400" cy="1371600"/>
+            <a:off x="532800" y="5097600"/>
+            <a:ext cx="572400" cy="1684800"/>
           </a:xfrm>
           <a:prstGeom prst="rect">
             <a:avLst/>
@@ -3860,7 +3860,7 @@
         </p:nvSpPr>
         <p:spPr>
           <a:xfrm>
-            <a:off x="1206000" y="5043600"/>
+            <a:off x="1206000" y="5518800"/>
             <a:ext cx="5752800" cy="7200"/>
           </a:xfrm>
           <a:prstGeom prst="rect">
@@ -3901,7 +3901,7 @@
         </p:nvSpPr>
         <p:spPr>
           <a:xfrm>
-            <a:off x="532800" y="4689000"/>
+            <a:off x="532800" y="5164200"/>
             <a:ext cx="572400" cy="288000"/>
           </a:xfrm>
           <a:prstGeom prst="rect">
@@ -3943,7 +3943,7 @@
         </p:nvSpPr>
         <p:spPr>
           <a:xfrm>
-            <a:off x="1177200" y="4658400"/>
+            <a:off x="1177200" y="5133600"/>
             <a:ext cx="5810400" cy="370799"/>
           </a:xfrm>
           <a:prstGeom prst="rect">
@@ -3985,8 +3985,8 @@
         </p:nvSpPr>
         <p:spPr>
           <a:xfrm>
-            <a:off x="1159200" y="5086800"/>
-            <a:ext cx="5828400" cy="885600"/>
+            <a:off x="1159200" y="5562000"/>
+            <a:ext cx="5828400" cy="1184399"/>
           </a:xfrm>
           <a:prstGeom prst="rect">
             <a:avLst/>
@@ -4079,312 +4079,6 @@
       <p:sp>
         <p:nvSpPr>
           <p:cNvPr id="21" name="Rectangle 20"/>
-          <p:cNvSpPr/>
-          <p:nvPr/>
-        </p:nvSpPr>
-        <p:spPr>
-          <a:xfrm>
-            <a:off x="532800" y="6058799"/>
-            <a:ext cx="6490800" cy="1371600"/>
-          </a:xfrm>
-          <a:prstGeom prst="rect">
-            <a:avLst/>
-          </a:prstGeom>
-          <a:solidFill>
-            <a:srgbClr val="EBF7F6"/>
-          </a:solidFill>
-          <a:ln>
-            <a:noFill/>
-          </a:ln>
-        </p:spPr>
-        <p:style>
-          <a:lnRef idx="1">
-            <a:schemeClr val="accent1"/>
-          </a:lnRef>
-          <a:fillRef idx="3">
-            <a:schemeClr val="accent1"/>
-          </a:fillRef>
-          <a:effectRef idx="2">
-            <a:schemeClr val="accent1"/>
-          </a:effectRef>
-          <a:fontRef idx="minor">
-            <a:schemeClr val="lt1"/>
-          </a:fontRef>
-        </p:style>
-        <p:txBody>
-          <a:bodyPr rtlCol="0" anchor="ctr"/>
-          <a:lstStyle/>
-          <a:p/>
-        </p:txBody>
-      </p:sp>
-      <p:sp>
-        <p:nvSpPr>
-          <p:cNvPr id="22" name="Rectangle 21"/>
-          <p:cNvSpPr/>
-          <p:nvPr/>
-        </p:nvSpPr>
-        <p:spPr>
-          <a:xfrm>
-            <a:off x="532800" y="6058799"/>
-            <a:ext cx="572400" cy="1371600"/>
-          </a:xfrm>
-          <a:prstGeom prst="rect">
-            <a:avLst/>
-          </a:prstGeom>
-          <a:solidFill>
-            <a:srgbClr val="187C88"/>
-          </a:solidFill>
-          <a:ln>
-            <a:noFill/>
-          </a:ln>
-        </p:spPr>
-        <p:style>
-          <a:lnRef idx="1">
-            <a:schemeClr val="accent1"/>
-          </a:lnRef>
-          <a:fillRef idx="3">
-            <a:schemeClr val="accent1"/>
-          </a:fillRef>
-          <a:effectRef idx="2">
-            <a:schemeClr val="accent1"/>
-          </a:effectRef>
-          <a:fontRef idx="minor">
-            <a:schemeClr val="lt1"/>
-          </a:fontRef>
-        </p:style>
-        <p:txBody>
-          <a:bodyPr rtlCol="0" anchor="ctr"/>
-          <a:lstStyle/>
-          <a:p/>
-        </p:txBody>
-      </p:sp>
-      <p:sp>
-        <p:nvSpPr>
-          <p:cNvPr id="23" name="Rectangle 22"/>
-          <p:cNvSpPr/>
-          <p:nvPr/>
-        </p:nvSpPr>
-        <p:spPr>
-          <a:xfrm>
-            <a:off x="1206000" y="6480000"/>
-            <a:ext cx="5752800" cy="7200"/>
-          </a:xfrm>
-          <a:prstGeom prst="rect">
-            <a:avLst/>
-          </a:prstGeom>
-          <a:solidFill>
-            <a:srgbClr val="DDDDDD"/>
-          </a:solidFill>
-          <a:ln>
-            <a:noFill/>
-          </a:ln>
-        </p:spPr>
-        <p:style>
-          <a:lnRef idx="1">
-            <a:schemeClr val="accent1"/>
-          </a:lnRef>
-          <a:fillRef idx="3">
-            <a:schemeClr val="accent1"/>
-          </a:fillRef>
-          <a:effectRef idx="2">
-            <a:schemeClr val="accent1"/>
-          </a:effectRef>
-          <a:fontRef idx="minor">
-            <a:schemeClr val="lt1"/>
-          </a:fontRef>
-        </p:style>
-        <p:txBody>
-          <a:bodyPr rtlCol="0" anchor="ctr"/>
-          <a:lstStyle/>
-          <a:p/>
-        </p:txBody>
-      </p:sp>
-      <p:sp>
-        <p:nvSpPr>
-          <p:cNvPr id="24" name="TextBox 23"/>
-          <p:cNvSpPr txBox="1"/>
-          <p:nvPr/>
-        </p:nvSpPr>
-        <p:spPr>
-          <a:xfrm>
-            <a:off x="532800" y="6125399"/>
-            <a:ext cx="572400" cy="288000"/>
-          </a:xfrm>
-          <a:prstGeom prst="rect">
-            <a:avLst/>
-          </a:prstGeom>
-          <a:noFill/>
-        </p:spPr>
-        <p:txBody>
-          <a:bodyPr wrap="square" tIns="0" bIns="0" lIns="18000" rIns="18000">
-            <a:spAutoFit/>
-          </a:bodyPr>
-          <a:lstStyle/>
-          <a:p>
-            <a:pPr algn="ctr">
-              <a:spcBef>
-                <a:spcPts val="0"/>
-              </a:spcBef>
-              <a:spcAft>
-                <a:spcPts val="100"/>
-              </a:spcAft>
-            </a:pPr>
-            <a:r>
-              <a:rPr sz="2200" b="1" i="0">
-                <a:solidFill>
-                  <a:srgbClr val="FFFFFF"/>
-                </a:solidFill>
-                <a:latin typeface="Arial"/>
-              </a:rPr>
-              <a:t>4</a:t>
-            </a:r>
-          </a:p>
-        </p:txBody>
-      </p:sp>
-      <p:sp>
-        <p:nvSpPr>
-          <p:cNvPr id="25" name="TextBox 24"/>
-          <p:cNvSpPr txBox="1"/>
-          <p:nvPr/>
-        </p:nvSpPr>
-        <p:spPr>
-          <a:xfrm>
-            <a:off x="1177200" y="6094800"/>
-            <a:ext cx="5810400" cy="370799"/>
-          </a:xfrm>
-          <a:prstGeom prst="rect">
-            <a:avLst/>
-          </a:prstGeom>
-          <a:noFill/>
-        </p:spPr>
-        <p:txBody>
-          <a:bodyPr wrap="square" tIns="0" bIns="0" lIns="18000" rIns="18000">
-            <a:spAutoFit/>
-          </a:bodyPr>
-          <a:lstStyle/>
-          <a:p>
-            <a:pPr algn="l">
-              <a:spcBef>
-                <a:spcPts val="0"/>
-              </a:spcBef>
-              <a:spcAft>
-                <a:spcPts val="100"/>
-              </a:spcAft>
-            </a:pPr>
-            <a:r>
-              <a:rPr sz="1100" b="1" i="0">
-                <a:solidFill>
-                  <a:srgbClr val="187C88"/>
-                </a:solidFill>
-                <a:latin typeface="Arial"/>
-              </a:rPr>
-              <a:t>Organiser ses applications sur l'écran d'accueil</a:t>
-            </a:r>
-          </a:p>
-        </p:txBody>
-      </p:sp>
-      <p:sp>
-        <p:nvSpPr>
-          <p:cNvPr id="26" name="TextBox 25"/>
-          <p:cNvSpPr txBox="1"/>
-          <p:nvPr/>
-        </p:nvSpPr>
-        <p:spPr>
-          <a:xfrm>
-            <a:off x="1159200" y="6523200"/>
-            <a:ext cx="5828400" cy="885600"/>
-          </a:xfrm>
-          <a:prstGeom prst="rect">
-            <a:avLst/>
-          </a:prstGeom>
-          <a:noFill/>
-        </p:spPr>
-        <p:txBody>
-          <a:bodyPr wrap="square" tIns="0" bIns="0" lIns="18000" rIns="18000">
-            <a:spAutoFit/>
-          </a:bodyPr>
-          <a:lstStyle/>
-          <a:p>
-            <a:pPr algn="l">
-              <a:spcBef>
-                <a:spcPts val="0"/>
-              </a:spcBef>
-              <a:spcAft>
-                <a:spcPts val="100"/>
-              </a:spcAft>
-            </a:pPr>
-            <a:r>
-              <a:rPr sz="1000" b="0" i="0">
-                <a:solidFill>
-                  <a:srgbClr val="2B2B2B"/>
-                </a:solidFill>
-                <a:latin typeface="Arial"/>
-              </a:rPr>
-              <a:t>→ Au fil du temps, les applications s'accumulent et l'écran d'accueil devient difficile à lire. Voici comment garder un téléphone bien rangé et agréable à utiliser.</a:t>
-            </a:r>
-          </a:p>
-          <a:p>
-            <a:pPr algn="l">
-              <a:spcBef>
-                <a:spcPts val="0"/>
-              </a:spcBef>
-              <a:spcAft>
-                <a:spcPts val="100"/>
-              </a:spcAft>
-            </a:pPr>
-            <a:r>
-              <a:rPr sz="1000" b="0" i="0">
-                <a:solidFill>
-                  <a:srgbClr val="2B2B2B"/>
-                </a:solidFill>
-                <a:latin typeface="Arial"/>
-              </a:rPr>
-              <a:t>→ Créer des dossiers</a:t>
-            </a:r>
-          </a:p>
-          <a:p>
-            <a:pPr algn="l">
-              <a:spcBef>
-                <a:spcPts val="0"/>
-              </a:spcBef>
-              <a:spcAft>
-                <a:spcPts val="100"/>
-              </a:spcAft>
-            </a:pPr>
-            <a:r>
-              <a:rPr sz="1000" b="0" i="0">
-                <a:solidFill>
-                  <a:srgbClr val="2B2B2B"/>
-                </a:solidFill>
-                <a:latin typeface="Arial"/>
-              </a:rPr>
-              <a:t>→ Maintenez votre doigt appuyé sur une icône jusqu'à ce qu'elle « tremble », puis faites-la glisser sur une autre app. Un dossier se crée automatiquement ! Nommez-le selon la catégorie : « Photos », « Finances », « Santé »</a:t>
-            </a:r>
-          </a:p>
-          <a:p>
-            <a:pPr algn="l">
-              <a:spcBef>
-                <a:spcPts val="0"/>
-              </a:spcBef>
-              <a:spcAft>
-                <a:spcPts val="100"/>
-              </a:spcAft>
-            </a:pPr>
-            <a:r>
-              <a:rPr sz="1000" b="0" i="0">
-                <a:solidFill>
-                  <a:srgbClr val="2B2B2B"/>
-                </a:solidFill>
-                <a:latin typeface="Arial"/>
-              </a:rPr>
-              <a:t>→ Déplacer les icônes</a:t>
-            </a:r>
-          </a:p>
-        </p:txBody>
-      </p:sp>
-      <p:sp>
-        <p:nvSpPr>
-          <p:cNvPr id="27" name="Rectangle 26"/>
           <p:cNvSpPr/>
           <p:nvPr/>
         </p:nvSpPr>
@@ -4427,7 +4121,7 @@
       </p:sp>
       <p:sp>
         <p:nvSpPr>
-          <p:cNvPr id="28" name="TextBox 27"/>
+          <p:cNvPr id="22" name="TextBox 21"/>
           <p:cNvSpPr txBox="1"/>
           <p:nvPr/>
         </p:nvSpPr>
@@ -4462,7 +4156,7 @@
                 </a:solidFill>
                 <a:latin typeface="Arial"/>
               </a:rPr>
-              <a:t>→ Suite en page 2 : Mettre à jour ses applications : pourquoi c'est important ? | Désinstaller une application : comment et quand ? | Gérer l'espace de stockage de son téléphone</a:t>
+              <a:t>→ Suite en page 2 : Organiser ses applications sur l'écran d'accueil | Mettre à jour ses applications : pourquoi c'est important ? | Désinstaller une application : comment et quand ?</a:t>
             </a:r>
           </a:p>
           <a:p>
@@ -4488,7 +4182,7 @@
       </p:sp>
       <p:sp>
         <p:nvSpPr>
-          <p:cNvPr id="29" name="TextBox 28"/>
+          <p:cNvPr id="23" name="TextBox 22"/>
           <p:cNvSpPr txBox="1"/>
           <p:nvPr/>
         </p:nvSpPr>
@@ -4624,7 +4318,313 @@
         <p:spPr>
           <a:xfrm>
             <a:off x="532800" y="1749600"/>
-            <a:ext cx="6490800" cy="1371600"/>
+            <a:ext cx="6490800" cy="1835999"/>
+          </a:xfrm>
+          <a:prstGeom prst="rect">
+            <a:avLst/>
+          </a:prstGeom>
+          <a:solidFill>
+            <a:srgbClr val="EBF7F6"/>
+          </a:solidFill>
+          <a:ln>
+            <a:noFill/>
+          </a:ln>
+        </p:spPr>
+        <p:style>
+          <a:lnRef idx="1">
+            <a:schemeClr val="accent1"/>
+          </a:lnRef>
+          <a:fillRef idx="3">
+            <a:schemeClr val="accent1"/>
+          </a:fillRef>
+          <a:effectRef idx="2">
+            <a:schemeClr val="accent1"/>
+          </a:effectRef>
+          <a:fontRef idx="minor">
+            <a:schemeClr val="lt1"/>
+          </a:fontRef>
+        </p:style>
+        <p:txBody>
+          <a:bodyPr rtlCol="0" anchor="ctr"/>
+          <a:lstStyle/>
+          <a:p/>
+        </p:txBody>
+      </p:sp>
+      <p:sp>
+        <p:nvSpPr>
+          <p:cNvPr id="4" name="Rectangle 3"/>
+          <p:cNvSpPr/>
+          <p:nvPr/>
+        </p:nvSpPr>
+        <p:spPr>
+          <a:xfrm>
+            <a:off x="532800" y="1749600"/>
+            <a:ext cx="572400" cy="1835999"/>
+          </a:xfrm>
+          <a:prstGeom prst="rect">
+            <a:avLst/>
+          </a:prstGeom>
+          <a:solidFill>
+            <a:srgbClr val="187C88"/>
+          </a:solidFill>
+          <a:ln>
+            <a:noFill/>
+          </a:ln>
+        </p:spPr>
+        <p:style>
+          <a:lnRef idx="1">
+            <a:schemeClr val="accent1"/>
+          </a:lnRef>
+          <a:fillRef idx="3">
+            <a:schemeClr val="accent1"/>
+          </a:fillRef>
+          <a:effectRef idx="2">
+            <a:schemeClr val="accent1"/>
+          </a:effectRef>
+          <a:fontRef idx="minor">
+            <a:schemeClr val="lt1"/>
+          </a:fontRef>
+        </p:style>
+        <p:txBody>
+          <a:bodyPr rtlCol="0" anchor="ctr"/>
+          <a:lstStyle/>
+          <a:p/>
+        </p:txBody>
+      </p:sp>
+      <p:sp>
+        <p:nvSpPr>
+          <p:cNvPr id="5" name="Rectangle 4"/>
+          <p:cNvSpPr/>
+          <p:nvPr/>
+        </p:nvSpPr>
+        <p:spPr>
+          <a:xfrm>
+            <a:off x="1206000" y="2170800"/>
+            <a:ext cx="5752800" cy="7200"/>
+          </a:xfrm>
+          <a:prstGeom prst="rect">
+            <a:avLst/>
+          </a:prstGeom>
+          <a:solidFill>
+            <a:srgbClr val="DDDDDD"/>
+          </a:solidFill>
+          <a:ln>
+            <a:noFill/>
+          </a:ln>
+        </p:spPr>
+        <p:style>
+          <a:lnRef idx="1">
+            <a:schemeClr val="accent1"/>
+          </a:lnRef>
+          <a:fillRef idx="3">
+            <a:schemeClr val="accent1"/>
+          </a:fillRef>
+          <a:effectRef idx="2">
+            <a:schemeClr val="accent1"/>
+          </a:effectRef>
+          <a:fontRef idx="minor">
+            <a:schemeClr val="lt1"/>
+          </a:fontRef>
+        </p:style>
+        <p:txBody>
+          <a:bodyPr rtlCol="0" anchor="ctr"/>
+          <a:lstStyle/>
+          <a:p/>
+        </p:txBody>
+      </p:sp>
+      <p:sp>
+        <p:nvSpPr>
+          <p:cNvPr id="6" name="TextBox 5"/>
+          <p:cNvSpPr txBox="1"/>
+          <p:nvPr/>
+        </p:nvSpPr>
+        <p:spPr>
+          <a:xfrm>
+            <a:off x="532800" y="1816200"/>
+            <a:ext cx="572400" cy="288000"/>
+          </a:xfrm>
+          <a:prstGeom prst="rect">
+            <a:avLst/>
+          </a:prstGeom>
+          <a:noFill/>
+        </p:spPr>
+        <p:txBody>
+          <a:bodyPr wrap="square" tIns="0" bIns="0" lIns="18000" rIns="18000">
+            <a:spAutoFit/>
+          </a:bodyPr>
+          <a:lstStyle/>
+          <a:p>
+            <a:pPr algn="ctr">
+              <a:spcBef>
+                <a:spcPts val="0"/>
+              </a:spcBef>
+              <a:spcAft>
+                <a:spcPts val="100"/>
+              </a:spcAft>
+            </a:pPr>
+            <a:r>
+              <a:rPr sz="2200" b="1" i="0">
+                <a:solidFill>
+                  <a:srgbClr val="FFFFFF"/>
+                </a:solidFill>
+                <a:latin typeface="Arial"/>
+              </a:rPr>
+              <a:t>4</a:t>
+            </a:r>
+          </a:p>
+        </p:txBody>
+      </p:sp>
+      <p:sp>
+        <p:nvSpPr>
+          <p:cNvPr id="7" name="TextBox 6"/>
+          <p:cNvSpPr txBox="1"/>
+          <p:nvPr/>
+        </p:nvSpPr>
+        <p:spPr>
+          <a:xfrm>
+            <a:off x="1177200" y="1785600"/>
+            <a:ext cx="5810400" cy="370799"/>
+          </a:xfrm>
+          <a:prstGeom prst="rect">
+            <a:avLst/>
+          </a:prstGeom>
+          <a:noFill/>
+        </p:spPr>
+        <p:txBody>
+          <a:bodyPr wrap="square" tIns="0" bIns="0" lIns="18000" rIns="18000">
+            <a:spAutoFit/>
+          </a:bodyPr>
+          <a:lstStyle/>
+          <a:p>
+            <a:pPr algn="l">
+              <a:spcBef>
+                <a:spcPts val="0"/>
+              </a:spcBef>
+              <a:spcAft>
+                <a:spcPts val="100"/>
+              </a:spcAft>
+            </a:pPr>
+            <a:r>
+              <a:rPr sz="1100" b="1" i="0">
+                <a:solidFill>
+                  <a:srgbClr val="187C88"/>
+                </a:solidFill>
+                <a:latin typeface="Arial"/>
+              </a:rPr>
+              <a:t>Organiser ses applications sur l'écran d'accueil</a:t>
+            </a:r>
+          </a:p>
+        </p:txBody>
+      </p:sp>
+      <p:sp>
+        <p:nvSpPr>
+          <p:cNvPr id="8" name="TextBox 7"/>
+          <p:cNvSpPr txBox="1"/>
+          <p:nvPr/>
+        </p:nvSpPr>
+        <p:spPr>
+          <a:xfrm>
+            <a:off x="1159200" y="2214000"/>
+            <a:ext cx="5828400" cy="1335599"/>
+          </a:xfrm>
+          <a:prstGeom prst="rect">
+            <a:avLst/>
+          </a:prstGeom>
+          <a:noFill/>
+        </p:spPr>
+        <p:txBody>
+          <a:bodyPr wrap="square" tIns="0" bIns="0" lIns="18000" rIns="18000">
+            <a:spAutoFit/>
+          </a:bodyPr>
+          <a:lstStyle/>
+          <a:p>
+            <a:pPr algn="l">
+              <a:spcBef>
+                <a:spcPts val="0"/>
+              </a:spcBef>
+              <a:spcAft>
+                <a:spcPts val="100"/>
+              </a:spcAft>
+            </a:pPr>
+            <a:r>
+              <a:rPr sz="1000" b="0" i="0">
+                <a:solidFill>
+                  <a:srgbClr val="2B2B2B"/>
+                </a:solidFill>
+                <a:latin typeface="Arial"/>
+              </a:rPr>
+              <a:t>→ Au fil du temps, les applications s'accumulent et l'écran d'accueil devient difficile à lire. Voici comment garder un téléphone bien rangé et agréable à utiliser.</a:t>
+            </a:r>
+          </a:p>
+          <a:p>
+            <a:pPr algn="l">
+              <a:spcBef>
+                <a:spcPts val="0"/>
+              </a:spcBef>
+              <a:spcAft>
+                <a:spcPts val="100"/>
+              </a:spcAft>
+            </a:pPr>
+            <a:r>
+              <a:rPr sz="1000" b="0" i="0">
+                <a:solidFill>
+                  <a:srgbClr val="2B2B2B"/>
+                </a:solidFill>
+                <a:latin typeface="Arial"/>
+              </a:rPr>
+              <a:t>→ Créer des dossiers</a:t>
+            </a:r>
+          </a:p>
+          <a:p>
+            <a:pPr algn="l">
+              <a:spcBef>
+                <a:spcPts val="0"/>
+              </a:spcBef>
+              <a:spcAft>
+                <a:spcPts val="100"/>
+              </a:spcAft>
+            </a:pPr>
+            <a:r>
+              <a:rPr sz="1000" b="0" i="0">
+                <a:solidFill>
+                  <a:srgbClr val="2B2B2B"/>
+                </a:solidFill>
+                <a:latin typeface="Arial"/>
+              </a:rPr>
+              <a:t>→ Maintenez votre doigt appuyé sur une icône jusqu'à ce qu'elle « tremble », puis faites-la glisser sur une autre app. Un dossier se crée automatiquement ! Nommez-le selon la catégorie : « Photos », « Finances », « Santé »</a:t>
+            </a:r>
+          </a:p>
+          <a:p>
+            <a:pPr algn="l">
+              <a:spcBef>
+                <a:spcPts val="0"/>
+              </a:spcBef>
+              <a:spcAft>
+                <a:spcPts val="100"/>
+              </a:spcAft>
+            </a:pPr>
+            <a:r>
+              <a:rPr sz="1000" b="0" i="0">
+                <a:solidFill>
+                  <a:srgbClr val="2B2B2B"/>
+                </a:solidFill>
+                <a:latin typeface="Arial"/>
+              </a:rPr>
+              <a:t>→ Déplacer les icônes</a:t>
+            </a:r>
+          </a:p>
+        </p:txBody>
+      </p:sp>
+      <p:sp>
+        <p:nvSpPr>
+          <p:cNvPr id="9" name="Rectangle 8"/>
+          <p:cNvSpPr/>
+          <p:nvPr/>
+        </p:nvSpPr>
+        <p:spPr>
+          <a:xfrm>
+            <a:off x="532800" y="3650400"/>
+            <a:ext cx="6490800" cy="1533600"/>
           </a:xfrm>
           <a:prstGeom prst="rect">
             <a:avLst/>
@@ -4658,14 +4658,14 @@
       </p:sp>
       <p:sp>
         <p:nvSpPr>
-          <p:cNvPr id="4" name="Rectangle 3"/>
+          <p:cNvPr id="10" name="Rectangle 9"/>
           <p:cNvSpPr/>
           <p:nvPr/>
         </p:nvSpPr>
         <p:spPr>
           <a:xfrm>
-            <a:off x="532800" y="1749600"/>
-            <a:ext cx="572400" cy="1371600"/>
+            <a:off x="532800" y="3650400"/>
+            <a:ext cx="572400" cy="1533600"/>
           </a:xfrm>
           <a:prstGeom prst="rect">
             <a:avLst/>
@@ -4699,13 +4699,13 @@
       </p:sp>
       <p:sp>
         <p:nvSpPr>
-          <p:cNvPr id="5" name="Rectangle 4"/>
+          <p:cNvPr id="11" name="Rectangle 10"/>
           <p:cNvSpPr/>
           <p:nvPr/>
         </p:nvSpPr>
         <p:spPr>
           <a:xfrm>
-            <a:off x="1206000" y="2170800"/>
+            <a:off x="1206000" y="4071600"/>
             <a:ext cx="5752800" cy="7200"/>
           </a:xfrm>
           <a:prstGeom prst="rect">
@@ -4740,13 +4740,13 @@
       </p:sp>
       <p:sp>
         <p:nvSpPr>
-          <p:cNvPr id="6" name="TextBox 5"/>
+          <p:cNvPr id="12" name="TextBox 11"/>
           <p:cNvSpPr txBox="1"/>
           <p:nvPr/>
         </p:nvSpPr>
         <p:spPr>
           <a:xfrm>
-            <a:off x="532800" y="1816200"/>
+            <a:off x="532800" y="3717000"/>
             <a:ext cx="572400" cy="288000"/>
           </a:xfrm>
           <a:prstGeom prst="rect">
@@ -4782,13 +4782,13 @@
       </p:sp>
       <p:sp>
         <p:nvSpPr>
-          <p:cNvPr id="7" name="TextBox 6"/>
+          <p:cNvPr id="13" name="TextBox 12"/>
           <p:cNvSpPr txBox="1"/>
           <p:nvPr/>
         </p:nvSpPr>
         <p:spPr>
           <a:xfrm>
-            <a:off x="1177200" y="1785600"/>
+            <a:off x="1177200" y="3686400"/>
             <a:ext cx="5810400" cy="370799"/>
           </a:xfrm>
           <a:prstGeom prst="rect">
@@ -4824,14 +4824,14 @@
       </p:sp>
       <p:sp>
         <p:nvSpPr>
-          <p:cNvPr id="8" name="TextBox 7"/>
+          <p:cNvPr id="14" name="TextBox 13"/>
           <p:cNvSpPr txBox="1"/>
           <p:nvPr/>
         </p:nvSpPr>
         <p:spPr>
           <a:xfrm>
-            <a:off x="1159200" y="2214000"/>
-            <a:ext cx="5828400" cy="885600"/>
+            <a:off x="1159200" y="4114800"/>
+            <a:ext cx="5828400" cy="1033199"/>
           </a:xfrm>
           <a:prstGeom prst="rect">
             <a:avLst/>
@@ -4923,14 +4923,14 @@
       </p:sp>
       <p:sp>
         <p:nvSpPr>
-          <p:cNvPr id="9" name="Rectangle 8"/>
+          <p:cNvPr id="15" name="Rectangle 14"/>
           <p:cNvSpPr/>
           <p:nvPr/>
         </p:nvSpPr>
         <p:spPr>
           <a:xfrm>
-            <a:off x="532800" y="3186000"/>
-            <a:ext cx="6490800" cy="1371600"/>
+            <a:off x="532800" y="5248800"/>
+            <a:ext cx="6490800" cy="1684800"/>
           </a:xfrm>
           <a:prstGeom prst="rect">
             <a:avLst/>
@@ -4964,14 +4964,14 @@
       </p:sp>
       <p:sp>
         <p:nvSpPr>
-          <p:cNvPr id="10" name="Rectangle 9"/>
+          <p:cNvPr id="16" name="Rectangle 15"/>
           <p:cNvSpPr/>
           <p:nvPr/>
         </p:nvSpPr>
         <p:spPr>
           <a:xfrm>
-            <a:off x="532800" y="3186000"/>
-            <a:ext cx="572400" cy="1371600"/>
+            <a:off x="532800" y="5248800"/>
+            <a:ext cx="572400" cy="1684800"/>
           </a:xfrm>
           <a:prstGeom prst="rect">
             <a:avLst/>
@@ -5005,13 +5005,13 @@
       </p:sp>
       <p:sp>
         <p:nvSpPr>
-          <p:cNvPr id="11" name="Rectangle 10"/>
+          <p:cNvPr id="17" name="Rectangle 16"/>
           <p:cNvSpPr/>
           <p:nvPr/>
         </p:nvSpPr>
         <p:spPr>
           <a:xfrm>
-            <a:off x="1206000" y="3607200"/>
+            <a:off x="1206000" y="5670000"/>
             <a:ext cx="5752800" cy="7200"/>
           </a:xfrm>
           <a:prstGeom prst="rect">
@@ -5046,13 +5046,13 @@
       </p:sp>
       <p:sp>
         <p:nvSpPr>
-          <p:cNvPr id="12" name="TextBox 11"/>
+          <p:cNvPr id="18" name="TextBox 17"/>
           <p:cNvSpPr txBox="1"/>
           <p:nvPr/>
         </p:nvSpPr>
         <p:spPr>
           <a:xfrm>
-            <a:off x="532800" y="3252600"/>
+            <a:off x="532800" y="5315400"/>
             <a:ext cx="572400" cy="288000"/>
           </a:xfrm>
           <a:prstGeom prst="rect">
@@ -5088,13 +5088,13 @@
       </p:sp>
       <p:sp>
         <p:nvSpPr>
-          <p:cNvPr id="13" name="TextBox 12"/>
+          <p:cNvPr id="19" name="TextBox 18"/>
           <p:cNvSpPr txBox="1"/>
           <p:nvPr/>
         </p:nvSpPr>
         <p:spPr>
           <a:xfrm>
-            <a:off x="1177200" y="3221999"/>
+            <a:off x="1177200" y="5284800"/>
             <a:ext cx="5810400" cy="370799"/>
           </a:xfrm>
           <a:prstGeom prst="rect">
@@ -5130,14 +5130,14 @@
       </p:sp>
       <p:sp>
         <p:nvSpPr>
-          <p:cNvPr id="14" name="TextBox 13"/>
+          <p:cNvPr id="20" name="TextBox 19"/>
           <p:cNvSpPr txBox="1"/>
           <p:nvPr/>
         </p:nvSpPr>
         <p:spPr>
           <a:xfrm>
-            <a:off x="1159200" y="3650399"/>
-            <a:ext cx="5828400" cy="885600"/>
+            <a:off x="1159200" y="5713200"/>
+            <a:ext cx="5828400" cy="1184399"/>
           </a:xfrm>
           <a:prstGeom prst="rect">
             <a:avLst/>
@@ -5229,14 +5229,14 @@
       </p:sp>
       <p:sp>
         <p:nvSpPr>
-          <p:cNvPr id="15" name="Rectangle 14"/>
+          <p:cNvPr id="21" name="Rectangle 20"/>
           <p:cNvSpPr/>
           <p:nvPr/>
         </p:nvSpPr>
         <p:spPr>
           <a:xfrm>
-            <a:off x="532800" y="4622400"/>
-            <a:ext cx="6490800" cy="1371600"/>
+            <a:off x="532800" y="6998399"/>
+            <a:ext cx="6490800" cy="1533600"/>
           </a:xfrm>
           <a:prstGeom prst="rect">
             <a:avLst/>
@@ -5270,14 +5270,14 @@
       </p:sp>
       <p:sp>
         <p:nvSpPr>
-          <p:cNvPr id="16" name="Rectangle 15"/>
+          <p:cNvPr id="22" name="Rectangle 21"/>
           <p:cNvSpPr/>
           <p:nvPr/>
         </p:nvSpPr>
         <p:spPr>
           <a:xfrm>
-            <a:off x="532800" y="4622400"/>
-            <a:ext cx="572400" cy="1371600"/>
+            <a:off x="532800" y="6998399"/>
+            <a:ext cx="572400" cy="1533600"/>
           </a:xfrm>
           <a:prstGeom prst="rect">
             <a:avLst/>
@@ -5311,13 +5311,13 @@
       </p:sp>
       <p:sp>
         <p:nvSpPr>
-          <p:cNvPr id="17" name="Rectangle 16"/>
+          <p:cNvPr id="23" name="Rectangle 22"/>
           <p:cNvSpPr/>
           <p:nvPr/>
         </p:nvSpPr>
         <p:spPr>
           <a:xfrm>
-            <a:off x="1206000" y="5043600"/>
+            <a:off x="1206000" y="7419600"/>
             <a:ext cx="5752800" cy="7200"/>
           </a:xfrm>
           <a:prstGeom prst="rect">
@@ -5352,13 +5352,13 @@
       </p:sp>
       <p:sp>
         <p:nvSpPr>
-          <p:cNvPr id="18" name="TextBox 17"/>
+          <p:cNvPr id="24" name="TextBox 23"/>
           <p:cNvSpPr txBox="1"/>
           <p:nvPr/>
         </p:nvSpPr>
         <p:spPr>
           <a:xfrm>
-            <a:off x="532800" y="4689000"/>
+            <a:off x="532800" y="7064999"/>
             <a:ext cx="572400" cy="288000"/>
           </a:xfrm>
           <a:prstGeom prst="rect">
@@ -5394,13 +5394,13 @@
       </p:sp>
       <p:sp>
         <p:nvSpPr>
-          <p:cNvPr id="19" name="TextBox 18"/>
+          <p:cNvPr id="25" name="TextBox 24"/>
           <p:cNvSpPr txBox="1"/>
           <p:nvPr/>
         </p:nvSpPr>
         <p:spPr>
           <a:xfrm>
-            <a:off x="1177200" y="4658400"/>
+            <a:off x="1177200" y="7034400"/>
             <a:ext cx="5810400" cy="370799"/>
           </a:xfrm>
           <a:prstGeom prst="rect">
@@ -5436,14 +5436,14 @@
       </p:sp>
       <p:sp>
         <p:nvSpPr>
-          <p:cNvPr id="20" name="TextBox 19"/>
+          <p:cNvPr id="26" name="TextBox 25"/>
           <p:cNvSpPr txBox="1"/>
           <p:nvPr/>
         </p:nvSpPr>
         <p:spPr>
           <a:xfrm>
-            <a:off x="1159200" y="5086800"/>
-            <a:ext cx="5828400" cy="885600"/>
+            <a:off x="1159200" y="7462800"/>
+            <a:ext cx="5828400" cy="1033199"/>
           </a:xfrm>
           <a:prstGeom prst="rect">
             <a:avLst/>
@@ -5497,7 +5497,7 @@
       </p:sp>
       <p:sp>
         <p:nvSpPr>
-          <p:cNvPr id="21" name="Rectangle 20"/>
+          <p:cNvPr id="27" name="Rectangle 26"/>
           <p:cNvSpPr/>
           <p:nvPr/>
         </p:nvSpPr>
@@ -5540,7 +5540,7 @@
       </p:sp>
       <p:sp>
         <p:nvSpPr>
-          <p:cNvPr id="22" name="Rectangle 21"/>
+          <p:cNvPr id="28" name="Rectangle 27"/>
           <p:cNvSpPr/>
           <p:nvPr/>
         </p:nvSpPr>
@@ -5581,7 +5581,7 @@
       </p:sp>
       <p:sp>
         <p:nvSpPr>
-          <p:cNvPr id="23" name="TextBox 22"/>
+          <p:cNvPr id="29" name="TextBox 28"/>
           <p:cNvSpPr txBox="1"/>
           <p:nvPr/>
         </p:nvSpPr>
@@ -5699,7 +5699,7 @@
       </p:sp>
       <p:sp>
         <p:nvSpPr>
-          <p:cNvPr id="24" name="TextBox 23"/>
+          <p:cNvPr id="30" name="TextBox 29"/>
           <p:cNvSpPr txBox="1"/>
           <p:nvPr/>
         </p:nvSpPr>

--- a/assets/memos/A4-memo.pptx
+++ b/assets/memos/A4-memo.pptx
@@ -3097,9 +3097,35 @@
         <p:nvPr/>
       </p:nvGrpSpPr>
       <p:grpSpPr/>
-      <p:sp>
-        <p:nvSpPr>
-          <p:cNvPr id="2" name="TextBox 1"/>
+      <p:pic>
+        <p:nvPicPr>
+          <p:cNvPr id="2" name="Picture 1" descr="bg-p1.png"/>
+          <p:cNvPicPr>
+            <a:picLocks noChangeAspect="1"/>
+          </p:cNvPicPr>
+          <p:nvPr/>
+        </p:nvPicPr>
+        <p:blipFill>
+          <a:blip r:embed="rId2">
+            <a:alphaModFix amt="80000"/>
+          </a:blip>
+          <a:stretch>
+            <a:fillRect/>
+          </a:stretch>
+        </p:blipFill>
+        <p:spPr>
+          <a:xfrm>
+            <a:off x="0" y="0"/>
+            <a:ext cx="7556399" cy="10692000"/>
+          </a:xfrm>
+          <a:prstGeom prst="rect">
+            <a:avLst/>
+          </a:prstGeom>
+        </p:spPr>
+      </p:pic>
+      <p:sp>
+        <p:nvSpPr>
+          <p:cNvPr id="3" name="TextBox 2"/>
           <p:cNvSpPr txBox="1"/>
           <p:nvPr/>
         </p:nvSpPr>
@@ -3160,7 +3186,7 @@
       </p:sp>
       <p:sp>
         <p:nvSpPr>
-          <p:cNvPr id="3" name="Rectangle 2"/>
+          <p:cNvPr id="4" name="Rectangle 3"/>
           <p:cNvSpPr/>
           <p:nvPr/>
         </p:nvSpPr>
@@ -3201,7 +3227,7 @@
       </p:sp>
       <p:sp>
         <p:nvSpPr>
-          <p:cNvPr id="4" name="Rectangle 3"/>
+          <p:cNvPr id="5" name="Rectangle 4"/>
           <p:cNvSpPr/>
           <p:nvPr/>
         </p:nvSpPr>
@@ -3242,7 +3268,7 @@
       </p:sp>
       <p:sp>
         <p:nvSpPr>
-          <p:cNvPr id="5" name="Rectangle 4"/>
+          <p:cNvPr id="6" name="Rectangle 5"/>
           <p:cNvSpPr/>
           <p:nvPr/>
         </p:nvSpPr>
@@ -3283,7 +3309,7 @@
       </p:sp>
       <p:sp>
         <p:nvSpPr>
-          <p:cNvPr id="6" name="TextBox 5"/>
+          <p:cNvPr id="7" name="TextBox 6"/>
           <p:cNvSpPr txBox="1"/>
           <p:nvPr/>
         </p:nvSpPr>
@@ -3325,7 +3351,7 @@
       </p:sp>
       <p:sp>
         <p:nvSpPr>
-          <p:cNvPr id="7" name="TextBox 6"/>
+          <p:cNvPr id="8" name="TextBox 7"/>
           <p:cNvSpPr txBox="1"/>
           <p:nvPr/>
         </p:nvSpPr>
@@ -3367,7 +3393,7 @@
       </p:sp>
       <p:sp>
         <p:nvSpPr>
-          <p:cNvPr id="8" name="TextBox 7"/>
+          <p:cNvPr id="9" name="TextBox 8"/>
           <p:cNvSpPr txBox="1"/>
           <p:nvPr/>
         </p:nvSpPr>
@@ -3466,7 +3492,7 @@
       </p:sp>
       <p:sp>
         <p:nvSpPr>
-          <p:cNvPr id="9" name="Rectangle 8"/>
+          <p:cNvPr id="10" name="Rectangle 9"/>
           <p:cNvSpPr/>
           <p:nvPr/>
         </p:nvSpPr>
@@ -3507,7 +3533,7 @@
       </p:sp>
       <p:sp>
         <p:nvSpPr>
-          <p:cNvPr id="10" name="Rectangle 9"/>
+          <p:cNvPr id="11" name="Rectangle 10"/>
           <p:cNvSpPr/>
           <p:nvPr/>
         </p:nvSpPr>
@@ -3548,7 +3574,7 @@
       </p:sp>
       <p:sp>
         <p:nvSpPr>
-          <p:cNvPr id="11" name="Rectangle 10"/>
+          <p:cNvPr id="12" name="Rectangle 11"/>
           <p:cNvSpPr/>
           <p:nvPr/>
         </p:nvSpPr>
@@ -3589,7 +3615,7 @@
       </p:sp>
       <p:sp>
         <p:nvSpPr>
-          <p:cNvPr id="12" name="TextBox 11"/>
+          <p:cNvPr id="13" name="TextBox 12"/>
           <p:cNvSpPr txBox="1"/>
           <p:nvPr/>
         </p:nvSpPr>
@@ -3631,7 +3657,7 @@
       </p:sp>
       <p:sp>
         <p:nvSpPr>
-          <p:cNvPr id="13" name="TextBox 12"/>
+          <p:cNvPr id="14" name="TextBox 13"/>
           <p:cNvSpPr txBox="1"/>
           <p:nvPr/>
         </p:nvSpPr>
@@ -3673,7 +3699,7 @@
       </p:sp>
       <p:sp>
         <p:nvSpPr>
-          <p:cNvPr id="14" name="TextBox 13"/>
+          <p:cNvPr id="15" name="TextBox 14"/>
           <p:cNvSpPr txBox="1"/>
           <p:nvPr/>
         </p:nvSpPr>
@@ -3772,7 +3798,7 @@
       </p:sp>
       <p:sp>
         <p:nvSpPr>
-          <p:cNvPr id="15" name="Rectangle 14"/>
+          <p:cNvPr id="16" name="Rectangle 15"/>
           <p:cNvSpPr/>
           <p:nvPr/>
         </p:nvSpPr>
@@ -3813,7 +3839,7 @@
       </p:sp>
       <p:sp>
         <p:nvSpPr>
-          <p:cNvPr id="16" name="Rectangle 15"/>
+          <p:cNvPr id="17" name="Rectangle 16"/>
           <p:cNvSpPr/>
           <p:nvPr/>
         </p:nvSpPr>
@@ -3854,7 +3880,7 @@
       </p:sp>
       <p:sp>
         <p:nvSpPr>
-          <p:cNvPr id="17" name="Rectangle 16"/>
+          <p:cNvPr id="18" name="Rectangle 17"/>
           <p:cNvSpPr/>
           <p:nvPr/>
         </p:nvSpPr>
@@ -3895,7 +3921,7 @@
       </p:sp>
       <p:sp>
         <p:nvSpPr>
-          <p:cNvPr id="18" name="TextBox 17"/>
+          <p:cNvPr id="19" name="TextBox 18"/>
           <p:cNvSpPr txBox="1"/>
           <p:nvPr/>
         </p:nvSpPr>
@@ -3937,7 +3963,7 @@
       </p:sp>
       <p:sp>
         <p:nvSpPr>
-          <p:cNvPr id="19" name="TextBox 18"/>
+          <p:cNvPr id="20" name="TextBox 19"/>
           <p:cNvSpPr txBox="1"/>
           <p:nvPr/>
         </p:nvSpPr>
@@ -3979,7 +4005,7 @@
       </p:sp>
       <p:sp>
         <p:nvSpPr>
-          <p:cNvPr id="20" name="TextBox 19"/>
+          <p:cNvPr id="21" name="TextBox 20"/>
           <p:cNvSpPr txBox="1"/>
           <p:nvPr/>
         </p:nvSpPr>
@@ -4078,7 +4104,7 @@
       </p:sp>
       <p:sp>
         <p:nvSpPr>
-          <p:cNvPr id="21" name="Rectangle 20"/>
+          <p:cNvPr id="22" name="Rectangle 21"/>
           <p:cNvSpPr/>
           <p:nvPr/>
         </p:nvSpPr>
@@ -4121,7 +4147,7 @@
       </p:sp>
       <p:sp>
         <p:nvSpPr>
-          <p:cNvPr id="22" name="TextBox 21"/>
+          <p:cNvPr id="23" name="TextBox 22"/>
           <p:cNvSpPr txBox="1"/>
           <p:nvPr/>
         </p:nvSpPr>
@@ -4182,7 +4208,7 @@
       </p:sp>
       <p:sp>
         <p:nvSpPr>
-          <p:cNvPr id="23" name="TextBox 22"/>
+          <p:cNvPr id="24" name="TextBox 23"/>
           <p:cNvSpPr txBox="1"/>
           <p:nvPr/>
         </p:nvSpPr>
@@ -4248,9 +4274,35 @@
         <p:nvPr/>
       </p:nvGrpSpPr>
       <p:grpSpPr/>
-      <p:sp>
-        <p:nvSpPr>
-          <p:cNvPr id="2" name="TextBox 1"/>
+      <p:pic>
+        <p:nvPicPr>
+          <p:cNvPr id="2" name="Picture 1" descr="bg-p2.png"/>
+          <p:cNvPicPr>
+            <a:picLocks noChangeAspect="1"/>
+          </p:cNvPicPr>
+          <p:nvPr/>
+        </p:nvPicPr>
+        <p:blipFill>
+          <a:blip r:embed="rId2">
+            <a:alphaModFix amt="80000"/>
+          </a:blip>
+          <a:stretch>
+            <a:fillRect/>
+          </a:stretch>
+        </p:blipFill>
+        <p:spPr>
+          <a:xfrm>
+            <a:off x="0" y="0"/>
+            <a:ext cx="7556399" cy="10692000"/>
+          </a:xfrm>
+          <a:prstGeom prst="rect">
+            <a:avLst/>
+          </a:prstGeom>
+        </p:spPr>
+      </p:pic>
+      <p:sp>
+        <p:nvSpPr>
+          <p:cNvPr id="3" name="TextBox 2"/>
           <p:cNvSpPr txBox="1"/>
           <p:nvPr/>
         </p:nvSpPr>
@@ -4311,7 +4363,7 @@
       </p:sp>
       <p:sp>
         <p:nvSpPr>
-          <p:cNvPr id="3" name="Rectangle 2"/>
+          <p:cNvPr id="4" name="Rectangle 3"/>
           <p:cNvSpPr/>
           <p:nvPr/>
         </p:nvSpPr>
@@ -4352,7 +4404,7 @@
       </p:sp>
       <p:sp>
         <p:nvSpPr>
-          <p:cNvPr id="4" name="Rectangle 3"/>
+          <p:cNvPr id="5" name="Rectangle 4"/>
           <p:cNvSpPr/>
           <p:nvPr/>
         </p:nvSpPr>
@@ -4393,7 +4445,7 @@
       </p:sp>
       <p:sp>
         <p:nvSpPr>
-          <p:cNvPr id="5" name="Rectangle 4"/>
+          <p:cNvPr id="6" name="Rectangle 5"/>
           <p:cNvSpPr/>
           <p:nvPr/>
         </p:nvSpPr>
@@ -4434,7 +4486,7 @@
       </p:sp>
       <p:sp>
         <p:nvSpPr>
-          <p:cNvPr id="6" name="TextBox 5"/>
+          <p:cNvPr id="7" name="TextBox 6"/>
           <p:cNvSpPr txBox="1"/>
           <p:nvPr/>
         </p:nvSpPr>
@@ -4476,7 +4528,7 @@
       </p:sp>
       <p:sp>
         <p:nvSpPr>
-          <p:cNvPr id="7" name="TextBox 6"/>
+          <p:cNvPr id="8" name="TextBox 7"/>
           <p:cNvSpPr txBox="1"/>
           <p:nvPr/>
         </p:nvSpPr>
@@ -4518,7 +4570,7 @@
       </p:sp>
       <p:sp>
         <p:nvSpPr>
-          <p:cNvPr id="8" name="TextBox 7"/>
+          <p:cNvPr id="9" name="TextBox 8"/>
           <p:cNvSpPr txBox="1"/>
           <p:nvPr/>
         </p:nvSpPr>
@@ -4617,7 +4669,7 @@
       </p:sp>
       <p:sp>
         <p:nvSpPr>
-          <p:cNvPr id="9" name="Rectangle 8"/>
+          <p:cNvPr id="10" name="Rectangle 9"/>
           <p:cNvSpPr/>
           <p:nvPr/>
         </p:nvSpPr>
@@ -4658,7 +4710,7 @@
       </p:sp>
       <p:sp>
         <p:nvSpPr>
-          <p:cNvPr id="10" name="Rectangle 9"/>
+          <p:cNvPr id="11" name="Rectangle 10"/>
           <p:cNvSpPr/>
           <p:nvPr/>
         </p:nvSpPr>
@@ -4699,7 +4751,7 @@
       </p:sp>
       <p:sp>
         <p:nvSpPr>
-          <p:cNvPr id="11" name="Rectangle 10"/>
+          <p:cNvPr id="12" name="Rectangle 11"/>
           <p:cNvSpPr/>
           <p:nvPr/>
         </p:nvSpPr>
@@ -4740,7 +4792,7 @@
       </p:sp>
       <p:sp>
         <p:nvSpPr>
-          <p:cNvPr id="12" name="TextBox 11"/>
+          <p:cNvPr id="13" name="TextBox 12"/>
           <p:cNvSpPr txBox="1"/>
           <p:nvPr/>
         </p:nvSpPr>
@@ -4782,7 +4834,7 @@
       </p:sp>
       <p:sp>
         <p:nvSpPr>
-          <p:cNvPr id="13" name="TextBox 12"/>
+          <p:cNvPr id="14" name="TextBox 13"/>
           <p:cNvSpPr txBox="1"/>
           <p:nvPr/>
         </p:nvSpPr>
@@ -4824,7 +4876,7 @@
       </p:sp>
       <p:sp>
         <p:nvSpPr>
-          <p:cNvPr id="14" name="TextBox 13"/>
+          <p:cNvPr id="15" name="TextBox 14"/>
           <p:cNvSpPr txBox="1"/>
           <p:nvPr/>
         </p:nvSpPr>
@@ -4923,7 +4975,7 @@
       </p:sp>
       <p:sp>
         <p:nvSpPr>
-          <p:cNvPr id="15" name="Rectangle 14"/>
+          <p:cNvPr id="16" name="Rectangle 15"/>
           <p:cNvSpPr/>
           <p:nvPr/>
         </p:nvSpPr>
@@ -4964,7 +5016,7 @@
       </p:sp>
       <p:sp>
         <p:nvSpPr>
-          <p:cNvPr id="16" name="Rectangle 15"/>
+          <p:cNvPr id="17" name="Rectangle 16"/>
           <p:cNvSpPr/>
           <p:nvPr/>
         </p:nvSpPr>
@@ -5005,7 +5057,7 @@
       </p:sp>
       <p:sp>
         <p:nvSpPr>
-          <p:cNvPr id="17" name="Rectangle 16"/>
+          <p:cNvPr id="18" name="Rectangle 17"/>
           <p:cNvSpPr/>
           <p:nvPr/>
         </p:nvSpPr>
@@ -5046,7 +5098,7 @@
       </p:sp>
       <p:sp>
         <p:nvSpPr>
-          <p:cNvPr id="18" name="TextBox 17"/>
+          <p:cNvPr id="19" name="TextBox 18"/>
           <p:cNvSpPr txBox="1"/>
           <p:nvPr/>
         </p:nvSpPr>
@@ -5088,7 +5140,7 @@
       </p:sp>
       <p:sp>
         <p:nvSpPr>
-          <p:cNvPr id="19" name="TextBox 18"/>
+          <p:cNvPr id="20" name="TextBox 19"/>
           <p:cNvSpPr txBox="1"/>
           <p:nvPr/>
         </p:nvSpPr>
@@ -5130,7 +5182,7 @@
       </p:sp>
       <p:sp>
         <p:nvSpPr>
-          <p:cNvPr id="20" name="TextBox 19"/>
+          <p:cNvPr id="21" name="TextBox 20"/>
           <p:cNvSpPr txBox="1"/>
           <p:nvPr/>
         </p:nvSpPr>
@@ -5229,7 +5281,7 @@
       </p:sp>
       <p:sp>
         <p:nvSpPr>
-          <p:cNvPr id="21" name="Rectangle 20"/>
+          <p:cNvPr id="22" name="Rectangle 21"/>
           <p:cNvSpPr/>
           <p:nvPr/>
         </p:nvSpPr>
@@ -5270,7 +5322,7 @@
       </p:sp>
       <p:sp>
         <p:nvSpPr>
-          <p:cNvPr id="22" name="Rectangle 21"/>
+          <p:cNvPr id="23" name="Rectangle 22"/>
           <p:cNvSpPr/>
           <p:nvPr/>
         </p:nvSpPr>
@@ -5311,7 +5363,7 @@
       </p:sp>
       <p:sp>
         <p:nvSpPr>
-          <p:cNvPr id="23" name="Rectangle 22"/>
+          <p:cNvPr id="24" name="Rectangle 23"/>
           <p:cNvSpPr/>
           <p:nvPr/>
         </p:nvSpPr>
@@ -5352,7 +5404,7 @@
       </p:sp>
       <p:sp>
         <p:nvSpPr>
-          <p:cNvPr id="24" name="TextBox 23"/>
+          <p:cNvPr id="25" name="TextBox 24"/>
           <p:cNvSpPr txBox="1"/>
           <p:nvPr/>
         </p:nvSpPr>
@@ -5394,7 +5446,7 @@
       </p:sp>
       <p:sp>
         <p:nvSpPr>
-          <p:cNvPr id="25" name="TextBox 24"/>
+          <p:cNvPr id="26" name="TextBox 25"/>
           <p:cNvSpPr txBox="1"/>
           <p:nvPr/>
         </p:nvSpPr>
@@ -5436,7 +5488,7 @@
       </p:sp>
       <p:sp>
         <p:nvSpPr>
-          <p:cNvPr id="26" name="TextBox 25"/>
+          <p:cNvPr id="27" name="TextBox 26"/>
           <p:cNvSpPr txBox="1"/>
           <p:nvPr/>
         </p:nvSpPr>
@@ -5497,7 +5549,7 @@
       </p:sp>
       <p:sp>
         <p:nvSpPr>
-          <p:cNvPr id="27" name="Rectangle 26"/>
+          <p:cNvPr id="28" name="Rectangle 27"/>
           <p:cNvSpPr/>
           <p:nvPr/>
         </p:nvSpPr>
@@ -5540,7 +5592,7 @@
       </p:sp>
       <p:sp>
         <p:nvSpPr>
-          <p:cNvPr id="28" name="Rectangle 27"/>
+          <p:cNvPr id="29" name="Rectangle 28"/>
           <p:cNvSpPr/>
           <p:nvPr/>
         </p:nvSpPr>
@@ -5581,7 +5633,7 @@
       </p:sp>
       <p:sp>
         <p:nvSpPr>
-          <p:cNvPr id="29" name="TextBox 28"/>
+          <p:cNvPr id="30" name="TextBox 29"/>
           <p:cNvSpPr txBox="1"/>
           <p:nvPr/>
         </p:nvSpPr>
@@ -5699,7 +5751,7 @@
       </p:sp>
       <p:sp>
         <p:nvSpPr>
-          <p:cNvPr id="30" name="TextBox 29"/>
+          <p:cNvPr id="31" name="TextBox 30"/>
           <p:cNvSpPr txBox="1"/>
           <p:nvPr/>
         </p:nvSpPr>

--- a/assets/memos/A4-memo.pptx
+++ b/assets/memos/A4-memo.pptx
@@ -3084,9 +3084,12 @@
   <p:cSld>
     <p:bg>
       <p:bgPr>
-        <a:solidFill>
-          <a:srgbClr val="FFFFFF"/>
-        </a:solidFill>
+        <a:blipFill>
+          <a:blip r:embed="rId2"/>
+          <a:stretch>
+            <a:fillRect/>
+          </a:stretch>
+        </a:blipFill>
         <a:effectLst/>
       </p:bgPr>
     </p:bg>
@@ -3097,35 +3100,9 @@
         <p:nvPr/>
       </p:nvGrpSpPr>
       <p:grpSpPr/>
-      <p:pic>
-        <p:nvPicPr>
-          <p:cNvPr id="2" name="Picture 1" descr="bg-p1.png"/>
-          <p:cNvPicPr>
-            <a:picLocks noChangeAspect="1"/>
-          </p:cNvPicPr>
-          <p:nvPr/>
-        </p:nvPicPr>
-        <p:blipFill>
-          <a:blip r:embed="rId2">
-            <a:alphaModFix amt="80000"/>
-          </a:blip>
-          <a:stretch>
-            <a:fillRect/>
-          </a:stretch>
-        </p:blipFill>
-        <p:spPr>
-          <a:xfrm>
-            <a:off x="0" y="0"/>
-            <a:ext cx="7556399" cy="10692000"/>
-          </a:xfrm>
-          <a:prstGeom prst="rect">
-            <a:avLst/>
-          </a:prstGeom>
-        </p:spPr>
-      </p:pic>
-      <p:sp>
-        <p:nvSpPr>
-          <p:cNvPr id="3" name="TextBox 2"/>
+      <p:sp>
+        <p:nvSpPr>
+          <p:cNvPr id="2" name="TextBox 1"/>
           <p:cNvSpPr txBox="1"/>
           <p:nvPr/>
         </p:nvSpPr>
@@ -3186,7 +3163,7 @@
       </p:sp>
       <p:sp>
         <p:nvSpPr>
-          <p:cNvPr id="4" name="Rectangle 3"/>
+          <p:cNvPr id="3" name="Rectangle 2"/>
           <p:cNvSpPr/>
           <p:nvPr/>
         </p:nvSpPr>
@@ -3227,7 +3204,7 @@
       </p:sp>
       <p:sp>
         <p:nvSpPr>
-          <p:cNvPr id="5" name="Rectangle 4"/>
+          <p:cNvPr id="4" name="Rectangle 3"/>
           <p:cNvSpPr/>
           <p:nvPr/>
         </p:nvSpPr>
@@ -3268,7 +3245,7 @@
       </p:sp>
       <p:sp>
         <p:nvSpPr>
-          <p:cNvPr id="6" name="Rectangle 5"/>
+          <p:cNvPr id="5" name="Rectangle 4"/>
           <p:cNvSpPr/>
           <p:nvPr/>
         </p:nvSpPr>
@@ -3309,7 +3286,7 @@
       </p:sp>
       <p:sp>
         <p:nvSpPr>
-          <p:cNvPr id="7" name="TextBox 6"/>
+          <p:cNvPr id="6" name="TextBox 5"/>
           <p:cNvSpPr txBox="1"/>
           <p:nvPr/>
         </p:nvSpPr>
@@ -3351,7 +3328,7 @@
       </p:sp>
       <p:sp>
         <p:nvSpPr>
-          <p:cNvPr id="8" name="TextBox 7"/>
+          <p:cNvPr id="7" name="TextBox 6"/>
           <p:cNvSpPr txBox="1"/>
           <p:nvPr/>
         </p:nvSpPr>
@@ -3393,7 +3370,7 @@
       </p:sp>
       <p:sp>
         <p:nvSpPr>
-          <p:cNvPr id="9" name="TextBox 8"/>
+          <p:cNvPr id="8" name="TextBox 7"/>
           <p:cNvSpPr txBox="1"/>
           <p:nvPr/>
         </p:nvSpPr>
@@ -3492,7 +3469,7 @@
       </p:sp>
       <p:sp>
         <p:nvSpPr>
-          <p:cNvPr id="10" name="Rectangle 9"/>
+          <p:cNvPr id="9" name="Rectangle 8"/>
           <p:cNvSpPr/>
           <p:nvPr/>
         </p:nvSpPr>
@@ -3533,7 +3510,7 @@
       </p:sp>
       <p:sp>
         <p:nvSpPr>
-          <p:cNvPr id="11" name="Rectangle 10"/>
+          <p:cNvPr id="10" name="Rectangle 9"/>
           <p:cNvSpPr/>
           <p:nvPr/>
         </p:nvSpPr>
@@ -3574,7 +3551,7 @@
       </p:sp>
       <p:sp>
         <p:nvSpPr>
-          <p:cNvPr id="12" name="Rectangle 11"/>
+          <p:cNvPr id="11" name="Rectangle 10"/>
           <p:cNvSpPr/>
           <p:nvPr/>
         </p:nvSpPr>
@@ -3615,7 +3592,7 @@
       </p:sp>
       <p:sp>
         <p:nvSpPr>
-          <p:cNvPr id="13" name="TextBox 12"/>
+          <p:cNvPr id="12" name="TextBox 11"/>
           <p:cNvSpPr txBox="1"/>
           <p:nvPr/>
         </p:nvSpPr>
@@ -3657,7 +3634,7 @@
       </p:sp>
       <p:sp>
         <p:nvSpPr>
-          <p:cNvPr id="14" name="TextBox 13"/>
+          <p:cNvPr id="13" name="TextBox 12"/>
           <p:cNvSpPr txBox="1"/>
           <p:nvPr/>
         </p:nvSpPr>
@@ -3699,7 +3676,7 @@
       </p:sp>
       <p:sp>
         <p:nvSpPr>
-          <p:cNvPr id="15" name="TextBox 14"/>
+          <p:cNvPr id="14" name="TextBox 13"/>
           <p:cNvSpPr txBox="1"/>
           <p:nvPr/>
         </p:nvSpPr>
@@ -3798,7 +3775,7 @@
       </p:sp>
       <p:sp>
         <p:nvSpPr>
-          <p:cNvPr id="16" name="Rectangle 15"/>
+          <p:cNvPr id="15" name="Rectangle 14"/>
           <p:cNvSpPr/>
           <p:nvPr/>
         </p:nvSpPr>
@@ -3839,7 +3816,7 @@
       </p:sp>
       <p:sp>
         <p:nvSpPr>
-          <p:cNvPr id="17" name="Rectangle 16"/>
+          <p:cNvPr id="16" name="Rectangle 15"/>
           <p:cNvSpPr/>
           <p:nvPr/>
         </p:nvSpPr>
@@ -3880,7 +3857,7 @@
       </p:sp>
       <p:sp>
         <p:nvSpPr>
-          <p:cNvPr id="18" name="Rectangle 17"/>
+          <p:cNvPr id="17" name="Rectangle 16"/>
           <p:cNvSpPr/>
           <p:nvPr/>
         </p:nvSpPr>
@@ -3921,7 +3898,7 @@
       </p:sp>
       <p:sp>
         <p:nvSpPr>
-          <p:cNvPr id="19" name="TextBox 18"/>
+          <p:cNvPr id="18" name="TextBox 17"/>
           <p:cNvSpPr txBox="1"/>
           <p:nvPr/>
         </p:nvSpPr>
@@ -3963,7 +3940,7 @@
       </p:sp>
       <p:sp>
         <p:nvSpPr>
-          <p:cNvPr id="20" name="TextBox 19"/>
+          <p:cNvPr id="19" name="TextBox 18"/>
           <p:cNvSpPr txBox="1"/>
           <p:nvPr/>
         </p:nvSpPr>
@@ -4005,7 +3982,7 @@
       </p:sp>
       <p:sp>
         <p:nvSpPr>
-          <p:cNvPr id="21" name="TextBox 20"/>
+          <p:cNvPr id="20" name="TextBox 19"/>
           <p:cNvSpPr txBox="1"/>
           <p:nvPr/>
         </p:nvSpPr>
@@ -4104,7 +4081,7 @@
       </p:sp>
       <p:sp>
         <p:nvSpPr>
-          <p:cNvPr id="22" name="Rectangle 21"/>
+          <p:cNvPr id="21" name="Rectangle 20"/>
           <p:cNvSpPr/>
           <p:nvPr/>
         </p:nvSpPr>
@@ -4147,7 +4124,7 @@
       </p:sp>
       <p:sp>
         <p:nvSpPr>
-          <p:cNvPr id="23" name="TextBox 22"/>
+          <p:cNvPr id="22" name="TextBox 21"/>
           <p:cNvSpPr txBox="1"/>
           <p:nvPr/>
         </p:nvSpPr>
@@ -4208,7 +4185,7 @@
       </p:sp>
       <p:sp>
         <p:nvSpPr>
-          <p:cNvPr id="24" name="TextBox 23"/>
+          <p:cNvPr id="23" name="TextBox 22"/>
           <p:cNvSpPr txBox="1"/>
           <p:nvPr/>
         </p:nvSpPr>
@@ -4261,9 +4238,12 @@
   <p:cSld>
     <p:bg>
       <p:bgPr>
-        <a:solidFill>
-          <a:srgbClr val="FFFFFF"/>
-        </a:solidFill>
+        <a:blipFill>
+          <a:blip r:embed="rId2"/>
+          <a:stretch>
+            <a:fillRect/>
+          </a:stretch>
+        </a:blipFill>
         <a:effectLst/>
       </p:bgPr>
     </p:bg>
@@ -4274,35 +4254,9 @@
         <p:nvPr/>
       </p:nvGrpSpPr>
       <p:grpSpPr/>
-      <p:pic>
-        <p:nvPicPr>
-          <p:cNvPr id="2" name="Picture 1" descr="bg-p2.png"/>
-          <p:cNvPicPr>
-            <a:picLocks noChangeAspect="1"/>
-          </p:cNvPicPr>
-          <p:nvPr/>
-        </p:nvPicPr>
-        <p:blipFill>
-          <a:blip r:embed="rId2">
-            <a:alphaModFix amt="80000"/>
-          </a:blip>
-          <a:stretch>
-            <a:fillRect/>
-          </a:stretch>
-        </p:blipFill>
-        <p:spPr>
-          <a:xfrm>
-            <a:off x="0" y="0"/>
-            <a:ext cx="7556399" cy="10692000"/>
-          </a:xfrm>
-          <a:prstGeom prst="rect">
-            <a:avLst/>
-          </a:prstGeom>
-        </p:spPr>
-      </p:pic>
-      <p:sp>
-        <p:nvSpPr>
-          <p:cNvPr id="3" name="TextBox 2"/>
+      <p:sp>
+        <p:nvSpPr>
+          <p:cNvPr id="2" name="TextBox 1"/>
           <p:cNvSpPr txBox="1"/>
           <p:nvPr/>
         </p:nvSpPr>
@@ -4363,7 +4317,7 @@
       </p:sp>
       <p:sp>
         <p:nvSpPr>
-          <p:cNvPr id="4" name="Rectangle 3"/>
+          <p:cNvPr id="3" name="Rectangle 2"/>
           <p:cNvSpPr/>
           <p:nvPr/>
         </p:nvSpPr>
@@ -4404,7 +4358,7 @@
       </p:sp>
       <p:sp>
         <p:nvSpPr>
-          <p:cNvPr id="5" name="Rectangle 4"/>
+          <p:cNvPr id="4" name="Rectangle 3"/>
           <p:cNvSpPr/>
           <p:nvPr/>
         </p:nvSpPr>
@@ -4445,7 +4399,7 @@
       </p:sp>
       <p:sp>
         <p:nvSpPr>
-          <p:cNvPr id="6" name="Rectangle 5"/>
+          <p:cNvPr id="5" name="Rectangle 4"/>
           <p:cNvSpPr/>
           <p:nvPr/>
         </p:nvSpPr>
@@ -4486,7 +4440,7 @@
       </p:sp>
       <p:sp>
         <p:nvSpPr>
-          <p:cNvPr id="7" name="TextBox 6"/>
+          <p:cNvPr id="6" name="TextBox 5"/>
           <p:cNvSpPr txBox="1"/>
           <p:nvPr/>
         </p:nvSpPr>
@@ -4528,7 +4482,7 @@
       </p:sp>
       <p:sp>
         <p:nvSpPr>
-          <p:cNvPr id="8" name="TextBox 7"/>
+          <p:cNvPr id="7" name="TextBox 6"/>
           <p:cNvSpPr txBox="1"/>
           <p:nvPr/>
         </p:nvSpPr>
@@ -4570,7 +4524,7 @@
       </p:sp>
       <p:sp>
         <p:nvSpPr>
-          <p:cNvPr id="9" name="TextBox 8"/>
+          <p:cNvPr id="8" name="TextBox 7"/>
           <p:cNvSpPr txBox="1"/>
           <p:nvPr/>
         </p:nvSpPr>
@@ -4669,7 +4623,7 @@
       </p:sp>
       <p:sp>
         <p:nvSpPr>
-          <p:cNvPr id="10" name="Rectangle 9"/>
+          <p:cNvPr id="9" name="Rectangle 8"/>
           <p:cNvSpPr/>
           <p:nvPr/>
         </p:nvSpPr>
@@ -4710,7 +4664,7 @@
       </p:sp>
       <p:sp>
         <p:nvSpPr>
-          <p:cNvPr id="11" name="Rectangle 10"/>
+          <p:cNvPr id="10" name="Rectangle 9"/>
           <p:cNvSpPr/>
           <p:nvPr/>
         </p:nvSpPr>
@@ -4751,7 +4705,7 @@
       </p:sp>
       <p:sp>
         <p:nvSpPr>
-          <p:cNvPr id="12" name="Rectangle 11"/>
+          <p:cNvPr id="11" name="Rectangle 10"/>
           <p:cNvSpPr/>
           <p:nvPr/>
         </p:nvSpPr>
@@ -4792,7 +4746,7 @@
       </p:sp>
       <p:sp>
         <p:nvSpPr>
-          <p:cNvPr id="13" name="TextBox 12"/>
+          <p:cNvPr id="12" name="TextBox 11"/>
           <p:cNvSpPr txBox="1"/>
           <p:nvPr/>
         </p:nvSpPr>
@@ -4834,7 +4788,7 @@
       </p:sp>
       <p:sp>
         <p:nvSpPr>
-          <p:cNvPr id="14" name="TextBox 13"/>
+          <p:cNvPr id="13" name="TextBox 12"/>
           <p:cNvSpPr txBox="1"/>
           <p:nvPr/>
         </p:nvSpPr>
@@ -4876,7 +4830,7 @@
       </p:sp>
       <p:sp>
         <p:nvSpPr>
-          <p:cNvPr id="15" name="TextBox 14"/>
+          <p:cNvPr id="14" name="TextBox 13"/>
           <p:cNvSpPr txBox="1"/>
           <p:nvPr/>
         </p:nvSpPr>
@@ -4975,7 +4929,7 @@
       </p:sp>
       <p:sp>
         <p:nvSpPr>
-          <p:cNvPr id="16" name="Rectangle 15"/>
+          <p:cNvPr id="15" name="Rectangle 14"/>
           <p:cNvSpPr/>
           <p:nvPr/>
         </p:nvSpPr>
@@ -5016,7 +4970,7 @@
       </p:sp>
       <p:sp>
         <p:nvSpPr>
-          <p:cNvPr id="17" name="Rectangle 16"/>
+          <p:cNvPr id="16" name="Rectangle 15"/>
           <p:cNvSpPr/>
           <p:nvPr/>
         </p:nvSpPr>
@@ -5057,7 +5011,7 @@
       </p:sp>
       <p:sp>
         <p:nvSpPr>
-          <p:cNvPr id="18" name="Rectangle 17"/>
+          <p:cNvPr id="17" name="Rectangle 16"/>
           <p:cNvSpPr/>
           <p:nvPr/>
         </p:nvSpPr>
@@ -5098,7 +5052,7 @@
       </p:sp>
       <p:sp>
         <p:nvSpPr>
-          <p:cNvPr id="19" name="TextBox 18"/>
+          <p:cNvPr id="18" name="TextBox 17"/>
           <p:cNvSpPr txBox="1"/>
           <p:nvPr/>
         </p:nvSpPr>
@@ -5140,7 +5094,7 @@
       </p:sp>
       <p:sp>
         <p:nvSpPr>
-          <p:cNvPr id="20" name="TextBox 19"/>
+          <p:cNvPr id="19" name="TextBox 18"/>
           <p:cNvSpPr txBox="1"/>
           <p:nvPr/>
         </p:nvSpPr>
@@ -5182,7 +5136,7 @@
       </p:sp>
       <p:sp>
         <p:nvSpPr>
-          <p:cNvPr id="21" name="TextBox 20"/>
+          <p:cNvPr id="20" name="TextBox 19"/>
           <p:cNvSpPr txBox="1"/>
           <p:nvPr/>
         </p:nvSpPr>
@@ -5281,7 +5235,7 @@
       </p:sp>
       <p:sp>
         <p:nvSpPr>
-          <p:cNvPr id="22" name="Rectangle 21"/>
+          <p:cNvPr id="21" name="Rectangle 20"/>
           <p:cNvSpPr/>
           <p:nvPr/>
         </p:nvSpPr>
@@ -5322,7 +5276,7 @@
       </p:sp>
       <p:sp>
         <p:nvSpPr>
-          <p:cNvPr id="23" name="Rectangle 22"/>
+          <p:cNvPr id="22" name="Rectangle 21"/>
           <p:cNvSpPr/>
           <p:nvPr/>
         </p:nvSpPr>
@@ -5363,7 +5317,7 @@
       </p:sp>
       <p:sp>
         <p:nvSpPr>
-          <p:cNvPr id="24" name="Rectangle 23"/>
+          <p:cNvPr id="23" name="Rectangle 22"/>
           <p:cNvSpPr/>
           <p:nvPr/>
         </p:nvSpPr>
@@ -5404,7 +5358,7 @@
       </p:sp>
       <p:sp>
         <p:nvSpPr>
-          <p:cNvPr id="25" name="TextBox 24"/>
+          <p:cNvPr id="24" name="TextBox 23"/>
           <p:cNvSpPr txBox="1"/>
           <p:nvPr/>
         </p:nvSpPr>
@@ -5446,7 +5400,7 @@
       </p:sp>
       <p:sp>
         <p:nvSpPr>
-          <p:cNvPr id="26" name="TextBox 25"/>
+          <p:cNvPr id="25" name="TextBox 24"/>
           <p:cNvSpPr txBox="1"/>
           <p:nvPr/>
         </p:nvSpPr>
@@ -5488,7 +5442,7 @@
       </p:sp>
       <p:sp>
         <p:nvSpPr>
-          <p:cNvPr id="27" name="TextBox 26"/>
+          <p:cNvPr id="26" name="TextBox 25"/>
           <p:cNvSpPr txBox="1"/>
           <p:nvPr/>
         </p:nvSpPr>
@@ -5549,7 +5503,7 @@
       </p:sp>
       <p:sp>
         <p:nvSpPr>
-          <p:cNvPr id="28" name="Rectangle 27"/>
+          <p:cNvPr id="27" name="Rectangle 26"/>
           <p:cNvSpPr/>
           <p:nvPr/>
         </p:nvSpPr>
@@ -5592,7 +5546,7 @@
       </p:sp>
       <p:sp>
         <p:nvSpPr>
-          <p:cNvPr id="29" name="Rectangle 28"/>
+          <p:cNvPr id="28" name="Rectangle 27"/>
           <p:cNvSpPr/>
           <p:nvPr/>
         </p:nvSpPr>
@@ -5633,7 +5587,7 @@
       </p:sp>
       <p:sp>
         <p:nvSpPr>
-          <p:cNvPr id="30" name="TextBox 29"/>
+          <p:cNvPr id="29" name="TextBox 28"/>
           <p:cNvSpPr txBox="1"/>
           <p:nvPr/>
         </p:nvSpPr>
@@ -5751,7 +5705,7 @@
       </p:sp>
       <p:sp>
         <p:nvSpPr>
-          <p:cNvPr id="31" name="TextBox 30"/>
+          <p:cNvPr id="30" name="TextBox 29"/>
           <p:cNvSpPr txBox="1"/>
           <p:nvPr/>
         </p:nvSpPr>
